--- a/ppt/IoTAI18-TensorFlow.pptx
+++ b/ppt/IoTAI18-TensorFlow.pptx
@@ -5,10 +5,10 @@
     <p:sldMasterId id="2147483653" r:id="rId1"/>
   </p:sldMasterIdLst>
   <p:notesMasterIdLst>
-    <p:notesMasterId r:id="rId35"/>
+    <p:notesMasterId r:id="rId37"/>
   </p:notesMasterIdLst>
   <p:handoutMasterIdLst>
-    <p:handoutMasterId r:id="rId36"/>
+    <p:handoutMasterId r:id="rId38"/>
   </p:handoutMasterIdLst>
   <p:sldIdLst>
     <p:sldId id="264" r:id="rId2"/>
@@ -43,7 +43,9 @@
     <p:sldId id="306" r:id="rId31"/>
     <p:sldId id="351" r:id="rId32"/>
     <p:sldId id="352" r:id="rId33"/>
-    <p:sldId id="361" r:id="rId34"/>
+    <p:sldId id="266" r:id="rId34"/>
+    <p:sldId id="365" r:id="rId35"/>
+    <p:sldId id="361" r:id="rId36"/>
   </p:sldIdLst>
   <p:sldSz cx="9144000" cy="6858000" type="screen4x3"/>
   <p:notesSz cx="6648450" cy="9782175"/>
@@ -7622,6 +7624,253 @@
 </file>
 
 <file path=ppt/slides/slide33.xml><?xml version="1.0" encoding="utf-8"?>
+<p:sld xmlns:a="http://schemas.openxmlformats.org/drawingml/2006/main" xmlns:r="http://schemas.openxmlformats.org/officeDocument/2006/relationships" xmlns:p="http://schemas.openxmlformats.org/presentationml/2006/main">
+  <p:cSld>
+    <p:spTree>
+      <p:nvGrpSpPr>
+        <p:cNvPr id="1" name=""/>
+        <p:cNvGrpSpPr/>
+        <p:nvPr/>
+      </p:nvGrpSpPr>
+      <p:grpSpPr>
+        <a:xfrm>
+          <a:off x="0" y="0"/>
+          <a:ext cx="0" cy="0"/>
+          <a:chOff x="0" y="0"/>
+          <a:chExt cx="0" cy="0"/>
+        </a:xfrm>
+      </p:grpSpPr>
+      <p:sp>
+        <p:nvSpPr>
+          <p:cNvPr id="2" name="Titre 1">
+            <a:extLst>
+              <a:ext uri="{FF2B5EF4-FFF2-40B4-BE49-F238E27FC236}">
+                <a16:creationId xmlns:a16="http://schemas.microsoft.com/office/drawing/2014/main" id="{56E6E868-106D-3E09-2A65-9A56328AA1A0}"/>
+              </a:ext>
+            </a:extLst>
+          </p:cNvPr>
+          <p:cNvSpPr>
+            <a:spLocks noGrp="1"/>
+          </p:cNvSpPr>
+          <p:nvPr>
+            <p:ph type="title"/>
+          </p:nvPr>
+        </p:nvSpPr>
+        <p:spPr/>
+        <p:txBody>
+          <a:bodyPr/>
+          <a:lstStyle/>
+          <a:p>
+            <a:r>
+              <a:rPr lang="fr-FR" dirty="0"/>
+              <a:t>ONNX</a:t>
+            </a:r>
+          </a:p>
+        </p:txBody>
+      </p:sp>
+      <p:sp>
+        <p:nvSpPr>
+          <p:cNvPr id="3" name="Espace réservé du contenu 2">
+            <a:extLst>
+              <a:ext uri="{FF2B5EF4-FFF2-40B4-BE49-F238E27FC236}">
+                <a16:creationId xmlns:a16="http://schemas.microsoft.com/office/drawing/2014/main" id="{9D957D39-4169-822D-2196-606372B64A7D}"/>
+              </a:ext>
+            </a:extLst>
+          </p:cNvPr>
+          <p:cNvSpPr>
+            <a:spLocks noGrp="1"/>
+          </p:cNvSpPr>
+          <p:nvPr>
+            <p:ph idx="1"/>
+          </p:nvPr>
+        </p:nvSpPr>
+        <p:spPr/>
+        <p:txBody>
+          <a:bodyPr/>
+          <a:lstStyle/>
+          <a:p>
+            <a:r>
+              <a:rPr lang="fr-FR" dirty="0"/>
+              <a:t>ONNX pour Open Neural Network Exchange est format standardisé pour les réseaux de neurones</a:t>
+            </a:r>
+          </a:p>
+          <a:p>
+            <a:r>
+              <a:rPr lang="fr-FR" dirty="0"/>
+              <a:t>Compatible </a:t>
+            </a:r>
+            <a:r>
+              <a:rPr lang="fr-FR" dirty="0" err="1"/>
+              <a:t>PyTorch</a:t>
+            </a:r>
+            <a:r>
+              <a:rPr lang="fr-FR" dirty="0"/>
+              <a:t> &amp; TF</a:t>
+            </a:r>
+          </a:p>
+        </p:txBody>
+      </p:sp>
+      <p:pic>
+        <p:nvPicPr>
+          <p:cNvPr id="4" name="Image 3" descr="Description de l'image Open Neural Network Exchange logo.svg.">
+            <a:extLst>
+              <a:ext uri="{FF2B5EF4-FFF2-40B4-BE49-F238E27FC236}">
+                <a16:creationId xmlns:a16="http://schemas.microsoft.com/office/drawing/2014/main" id="{9BE9D5E0-D60F-ADB3-B9B1-1C40DD3BADB7}"/>
+              </a:ext>
+            </a:extLst>
+          </p:cNvPr>
+          <p:cNvPicPr>
+            <a:picLocks noChangeAspect="1"/>
+          </p:cNvPicPr>
+          <p:nvPr/>
+        </p:nvPicPr>
+        <p:blipFill>
+          <a:blip r:embed="rId2"/>
+          <a:stretch>
+            <a:fillRect/>
+          </a:stretch>
+        </p:blipFill>
+        <p:spPr>
+          <a:xfrm>
+            <a:off x="1187624" y="3573016"/>
+            <a:ext cx="6865374" cy="1716344"/>
+          </a:xfrm>
+          <a:prstGeom prst="rect">
+            <a:avLst/>
+          </a:prstGeom>
+        </p:spPr>
+      </p:pic>
+    </p:spTree>
+    <p:extLst>
+      <p:ext uri="{BB962C8B-B14F-4D97-AF65-F5344CB8AC3E}">
+        <p14:creationId xmlns:p14="http://schemas.microsoft.com/office/powerpoint/2010/main" val="73808658"/>
+      </p:ext>
+    </p:extLst>
+  </p:cSld>
+  <p:clrMapOvr>
+    <a:masterClrMapping/>
+  </p:clrMapOvr>
+</p:sld>
+</file>
+
+<file path=ppt/slides/slide34.xml><?xml version="1.0" encoding="utf-8"?>
+<p:sld xmlns:a="http://schemas.openxmlformats.org/drawingml/2006/main" xmlns:r="http://schemas.openxmlformats.org/officeDocument/2006/relationships" xmlns:p="http://schemas.openxmlformats.org/presentationml/2006/main">
+  <p:cSld>
+    <p:spTree>
+      <p:nvGrpSpPr>
+        <p:cNvPr id="1" name=""/>
+        <p:cNvGrpSpPr/>
+        <p:nvPr/>
+      </p:nvGrpSpPr>
+      <p:grpSpPr>
+        <a:xfrm>
+          <a:off x="0" y="0"/>
+          <a:ext cx="0" cy="0"/>
+          <a:chOff x="0" y="0"/>
+          <a:chExt cx="0" cy="0"/>
+        </a:xfrm>
+      </p:grpSpPr>
+      <p:sp>
+        <p:nvSpPr>
+          <p:cNvPr id="2" name="Titre 1">
+            <a:extLst>
+              <a:ext uri="{FF2B5EF4-FFF2-40B4-BE49-F238E27FC236}">
+                <a16:creationId xmlns:a16="http://schemas.microsoft.com/office/drawing/2014/main" id="{3027B6EC-F8EF-5B95-D836-6A9D26295451}"/>
+              </a:ext>
+            </a:extLst>
+          </p:cNvPr>
+          <p:cNvSpPr>
+            <a:spLocks noGrp="1"/>
+          </p:cNvSpPr>
+          <p:nvPr>
+            <p:ph type="title"/>
+          </p:nvPr>
+        </p:nvSpPr>
+        <p:spPr/>
+        <p:txBody>
+          <a:bodyPr/>
+          <a:lstStyle/>
+          <a:p>
+            <a:r>
+              <a:rPr lang="fr-FR" dirty="0"/>
+              <a:t>tf2onnx</a:t>
+            </a:r>
+          </a:p>
+        </p:txBody>
+      </p:sp>
+      <p:sp>
+        <p:nvSpPr>
+          <p:cNvPr id="3" name="Espace réservé du contenu 2">
+            <a:extLst>
+              <a:ext uri="{FF2B5EF4-FFF2-40B4-BE49-F238E27FC236}">
+                <a16:creationId xmlns:a16="http://schemas.microsoft.com/office/drawing/2014/main" id="{A1224D95-6C8E-0231-CFD2-0114B10257A7}"/>
+              </a:ext>
+            </a:extLst>
+          </p:cNvPr>
+          <p:cNvSpPr>
+            <a:spLocks noGrp="1"/>
+          </p:cNvSpPr>
+          <p:nvPr>
+            <p:ph idx="1"/>
+          </p:nvPr>
+        </p:nvSpPr>
+        <p:spPr/>
+        <p:txBody>
+          <a:bodyPr/>
+          <a:lstStyle/>
+          <a:p>
+            <a:r>
+              <a:rPr lang="fr-FR" dirty="0"/>
+              <a:t>tf2onnx permet de convertir un .h5 ou .</a:t>
+            </a:r>
+            <a:r>
+              <a:rPr lang="fr-FR" dirty="0" err="1"/>
+              <a:t>keras</a:t>
+            </a:r>
+            <a:r>
+              <a:rPr lang="fr-FR" dirty="0"/>
+              <a:t> en ONNX</a:t>
+            </a:r>
+          </a:p>
+          <a:p>
+            <a:pPr lvl="1"/>
+            <a:r>
+              <a:rPr lang="fr-FR" dirty="0"/>
+              <a:t>Utile pour la </a:t>
+            </a:r>
+            <a:r>
+              <a:rPr lang="fr-FR" dirty="0" err="1"/>
+              <a:t>quantisation</a:t>
+            </a:r>
+            <a:endParaRPr lang="fr-FR" dirty="0"/>
+          </a:p>
+          <a:p>
+            <a:pPr lvl="1"/>
+            <a:r>
+              <a:rPr lang="fr-FR" dirty="0"/>
+              <a:t>Utile pour la portabilité </a:t>
+            </a:r>
+            <a:r>
+              <a:rPr lang="fr-FR"/>
+              <a:t>Pytorch</a:t>
+            </a:r>
+          </a:p>
+        </p:txBody>
+      </p:sp>
+    </p:spTree>
+    <p:extLst>
+      <p:ext uri="{BB962C8B-B14F-4D97-AF65-F5344CB8AC3E}">
+        <p14:creationId xmlns:p14="http://schemas.microsoft.com/office/powerpoint/2010/main" val="3095798295"/>
+      </p:ext>
+    </p:extLst>
+  </p:cSld>
+  <p:clrMapOvr>
+    <a:masterClrMapping/>
+  </p:clrMapOvr>
+</p:sld>
+</file>
+
+<file path=ppt/slides/slide35.xml><?xml version="1.0" encoding="utf-8"?>
 <p:sld xmlns:a="http://schemas.openxmlformats.org/drawingml/2006/main" xmlns:r="http://schemas.openxmlformats.org/officeDocument/2006/relationships" xmlns:p="http://schemas.openxmlformats.org/presentationml/2006/main">
   <p:cSld>
     <p:spTree>

--- a/ppt/IoTAI18-TensorFlow.pptx
+++ b/ppt/IoTAI18-TensorFlow.pptx
@@ -7909,9 +7909,10 @@
           <a:lstStyle/>
           <a:p>
             <a:r>
-              <a:rPr lang="fr-FR" dirty="0"/>
-              <a:t>TP 16</a:t>
-            </a:r>
+              <a:rPr lang="fr-FR"/>
+              <a:t>TP 17</a:t>
+            </a:r>
+            <a:endParaRPr lang="fr-FR" dirty="0"/>
           </a:p>
         </p:txBody>
       </p:sp>

--- a/ppt/IoTAI18-TensorFlow.pptx
+++ b/ppt/IoTAI18-TensorFlow.pptx
@@ -6726,7 +6726,15 @@
             </a:r>
             <a:r>
               <a:rPr lang="fr-FR" dirty="0"/>
-              <a:t>(x) = x / </a:t>
+              <a:t>(x) = </a:t>
+            </a:r>
+            <a:r>
+              <a:rPr lang="fr-FR" dirty="0" err="1"/>
+              <a:t>exp</a:t>
+            </a:r>
+            <a:r>
+              <a:rPr lang="fr-FR" dirty="0"/>
+              <a:t>(x) / </a:t>
             </a:r>
             <a:r>
               <a:rPr lang="fr-FR" dirty="0" err="1"/>
@@ -6734,8 +6742,17 @@
             </a:r>
             <a:r>
               <a:rPr lang="fr-FR" dirty="0"/>
-              <a:t>(x)</a:t>
-            </a:r>
+              <a:t>(</a:t>
+            </a:r>
+            <a:r>
+              <a:rPr lang="fr-FR" dirty="0" err="1"/>
+              <a:t>exp</a:t>
+            </a:r>
+            <a:r>
+              <a:rPr lang="fr-FR"/>
+              <a:t>(x))</a:t>
+            </a:r>
+            <a:endParaRPr lang="fr-FR" dirty="0"/>
           </a:p>
         </p:txBody>
       </p:sp>
